--- a/ALGORITMOS DE ORDENAMIENTO_EQUIP0_3.pptx
+++ b/ALGORITMOS DE ORDENAMIENTO_EQUIP0_3.pptx
@@ -1,6 +1,6 @@
 
 <file path=ppt/presentation.xml><?xml version="1.0" encoding="utf-8"?>
-<p:presentation xmlns:a="http://schemas.openxmlformats.org/drawingml/2006/main" xmlns:r="http://schemas.openxmlformats.org/officeDocument/2006/relationships" xmlns:mc="http://schemas.openxmlformats.org/markup-compatibility/2006" xmlns:mv="urn:schemas-microsoft-com:mac:vml" xmlns:p="http://schemas.openxmlformats.org/presentationml/2006/main" xmlns:c="http://schemas.openxmlformats.org/drawingml/2006/chart" xmlns:dgm="http://schemas.openxmlformats.org/drawingml/2006/diagram" xmlns:o="urn:schemas-microsoft-com:office:office" xmlns:v="urn:schemas-microsoft-com:vml" xmlns:pvml="urn:schemas-microsoft-com:office:powerpoint" xmlns:com="http://schemas.openxmlformats.org/drawingml/2006/compatibility" xmlns:p14="http://schemas.microsoft.com/office/powerpoint/2010/main" xmlns:p15="http://schemas.microsoft.com/office/powerpoint/2012/main" xmlns:ahyp="http://schemas.microsoft.com/office/drawing/2018/hyperlinkcolor" autoCompressPictures="0" embedTrueTypeFonts="1" strictFirstAndLastChars="0" saveSubsetFonts="1">
+<p:presentation xmlns:a="http://schemas.openxmlformats.org/drawingml/2006/main" xmlns:r="http://schemas.openxmlformats.org/officeDocument/2006/relationships" xmlns:mc="http://schemas.openxmlformats.org/markup-compatibility/2006" xmlns:mv="urn:schemas-microsoft-com:mac:vml" xmlns:p="http://schemas.openxmlformats.org/presentationml/2006/main" xmlns:c="http://schemas.openxmlformats.org/drawingml/2006/chart" xmlns:dgm="http://schemas.openxmlformats.org/drawingml/2006/diagram" xmlns:o="urn:schemas-microsoft-com:office:office" xmlns:v="urn:schemas-microsoft-com:vml" xmlns:pvml="urn:schemas-microsoft-com:office:powerpoint" xmlns:com="http://schemas.openxmlformats.org/drawingml/2006/compatibility" xmlns:p14="http://schemas.microsoft.com/office/powerpoint/2010/main" xmlns:p15="http://schemas.microsoft.com/office/powerpoint/2012/main" xmlns:ahyp="http://schemas.microsoft.com/office/drawing/2018/hyperlinkcolor" autoCompressPictures="0" strictFirstAndLastChars="0" saveSubsetFonts="1">
   <p:sldMasterIdLst>
     <p:sldMasterId id="2147483659" r:id="rId4"/>
   </p:sldMasterIdLst>
@@ -15,31 +15,6 @@
   </p:sldIdLst>
   <p:sldSz cy="6858000" cx="12192000"/>
   <p:notesSz cx="6858000" cy="9144000"/>
-  <p:embeddedFontLst>
-    <p:embeddedFont>
-      <p:font typeface="Fredoka"/>
-      <p:regular r:id="rId10"/>
-      <p:bold r:id="rId11"/>
-    </p:embeddedFont>
-    <p:embeddedFont>
-      <p:font typeface="Nunito"/>
-      <p:regular r:id="rId12"/>
-      <p:bold r:id="rId13"/>
-      <p:italic r:id="rId14"/>
-      <p:boldItalic r:id="rId15"/>
-    </p:embeddedFont>
-    <p:embeddedFont>
-      <p:font typeface="JetBrains Mono"/>
-      <p:regular r:id="rId16"/>
-      <p:bold r:id="rId17"/>
-      <p:italic r:id="rId18"/>
-      <p:boldItalic r:id="rId19"/>
-    </p:embeddedFont>
-    <p:embeddedFont>
-      <p:font typeface="Lexend Black"/>
-      <p:bold r:id="rId20"/>
-    </p:embeddedFont>
-  </p:embeddedFontLst>
   <p:defaultTextStyle>
     <a:defPPr lvl="0" marR="0" rtl="0" algn="l">
       <a:lnSpc>
@@ -286,6 +261,30 @@
     </p:ext>
   </p:extLst>
 </p:presentation>
+</file>
+
+<file path=ppt/presProps1.xml><?xml version="1.0" encoding="utf-8"?>
+<p:presentationPr xmlns:a="http://schemas.openxmlformats.org/drawingml/2006/main" xmlns:r="http://schemas.openxmlformats.org/officeDocument/2006/relationships" xmlns:mc="http://schemas.openxmlformats.org/markup-compatibility/2006" xmlns:mv="urn:schemas-microsoft-com:mac:vml" xmlns:p="http://schemas.openxmlformats.org/presentationml/2006/main" xmlns:c="http://schemas.openxmlformats.org/drawingml/2006/chart" xmlns:dgm="http://schemas.openxmlformats.org/drawingml/2006/diagram" xmlns:o="urn:schemas-microsoft-com:office:office" xmlns:v="urn:schemas-microsoft-com:vml" xmlns:pvml="urn:schemas-microsoft-com:office:powerpoint" xmlns:com="http://schemas.openxmlformats.org/drawingml/2006/compatibility" xmlns:p14="http://schemas.microsoft.com/office/powerpoint/2010/main" xmlns:p15="http://schemas.microsoft.com/office/powerpoint/2012/main" xmlns:ahyp="http://schemas.microsoft.com/office/drawing/2018/hyperlinkcolor"/>
+</file>
+
+<file path=ppt/viewProps1.xml><?xml version="1.0" encoding="utf-8"?>
+<p:viewPr xmlns:a="http://schemas.openxmlformats.org/drawingml/2006/main" xmlns:r="http://schemas.openxmlformats.org/officeDocument/2006/relationships" xmlns:mc="http://schemas.openxmlformats.org/markup-compatibility/2006" xmlns:mv="urn:schemas-microsoft-com:mac:vml" xmlns:p="http://schemas.openxmlformats.org/presentationml/2006/main" xmlns:c="http://schemas.openxmlformats.org/drawingml/2006/chart" xmlns:dgm="http://schemas.openxmlformats.org/drawingml/2006/diagram" xmlns:o="urn:schemas-microsoft-com:office:office" xmlns:v="urn:schemas-microsoft-com:vml" xmlns:pvml="urn:schemas-microsoft-com:office:powerpoint" xmlns:com="http://schemas.openxmlformats.org/drawingml/2006/compatibility" xmlns:p14="http://schemas.microsoft.com/office/powerpoint/2010/main" xmlns:p15="http://schemas.microsoft.com/office/powerpoint/2012/main" xmlns:ahyp="http://schemas.microsoft.com/office/drawing/2018/hyperlinkcolor" showComments="0">
+  <p:slideViewPr>
+    <p:cSldViewPr snapToGrid="0">
+      <p:cViewPr varScale="1">
+        <p:scale>
+          <a:sx n="100" d="100"/>
+          <a:sy n="100" d="100"/>
+        </p:scale>
+        <p:origin x="0" y="0"/>
+      </p:cViewPr>
+      <p:guideLst>
+        <p:guide pos="2160" orient="horz"/>
+        <p:guide pos="2880"/>
+      </p:guideLst>
+    </p:cSldViewPr>
+  </p:slideViewPr>
+</p:viewPr>
 </file>
 
 <file path=ppt/notesMasters/notesMaster1.xml><?xml version="1.0" encoding="utf-8"?>
@@ -17928,7 +17927,7 @@
     </p:bg>
     <p:spTree>
       <p:nvGrpSpPr>
-        <p:cNvPr id="148" name="Shape 148"/>
+        <p:cNvPr id="168" name="Shape 168"/>
         <p:cNvGrpSpPr/>
         <p:nvPr/>
       </p:nvGrpSpPr>
@@ -17942,7 +17941,7 @@
       </p:grpSpPr>
       <p:sp>
         <p:nvSpPr>
-          <p:cNvPr id="149" name="Google Shape;149;p16"/>
+          <p:cNvPr id="169" name="Google Shape;169;p1"/>
           <p:cNvSpPr/>
           <p:nvPr/>
         </p:nvSpPr>
@@ -18009,7 +18008,7 @@
       </p:sp>
       <p:sp>
         <p:nvSpPr>
-          <p:cNvPr id="150" name="Google Shape;150;p16"/>
+          <p:cNvPr id="170" name="Google Shape;170;p1"/>
           <p:cNvSpPr/>
           <p:nvPr/>
         </p:nvSpPr>
@@ -18076,7 +18075,7 @@
       </p:sp>
       <p:sp>
         <p:nvSpPr>
-          <p:cNvPr id="151" name="Google Shape;151;p16"/>
+          <p:cNvPr id="171" name="Google Shape;171;p1"/>
           <p:cNvSpPr/>
           <p:nvPr/>
         </p:nvSpPr>
@@ -18143,7 +18142,7 @@
       </p:sp>
       <p:sp>
         <p:nvSpPr>
-          <p:cNvPr id="152" name="Google Shape;152;p16"/>
+          <p:cNvPr id="172" name="Google Shape;172;p1"/>
           <p:cNvSpPr/>
           <p:nvPr/>
         </p:nvSpPr>
@@ -18204,7 +18203,7 @@
       </p:sp>
       <p:sp>
         <p:nvSpPr>
-          <p:cNvPr id="153" name="Google Shape;153;p16"/>
+          <p:cNvPr id="173" name="Google Shape;173;p1"/>
           <p:cNvSpPr/>
           <p:nvPr/>
         </p:nvSpPr>
@@ -18265,7 +18264,7 @@
       </p:sp>
       <p:sp>
         <p:nvSpPr>
-          <p:cNvPr id="154" name="Google Shape;154;p16"/>
+          <p:cNvPr id="174" name="Google Shape;174;p1"/>
           <p:cNvSpPr/>
           <p:nvPr/>
         </p:nvSpPr>
@@ -18324,7 +18323,7 @@
       </p:sp>
       <p:sp>
         <p:nvSpPr>
-          <p:cNvPr id="155" name="Google Shape;155;p16"/>
+          <p:cNvPr id="175" name="Google Shape;175;p1"/>
           <p:cNvSpPr/>
           <p:nvPr/>
         </p:nvSpPr>
@@ -18383,7 +18382,7 @@
       </p:sp>
       <p:sp>
         <p:nvSpPr>
-          <p:cNvPr id="156" name="Google Shape;156;p16"/>
+          <p:cNvPr id="176" name="Google Shape;176;p1"/>
           <p:cNvSpPr txBox="1"/>
           <p:nvPr/>
         </p:nvSpPr>
@@ -18428,10 +18427,10 @@
                 <a:solidFill>
                   <a:srgbClr val="0F172A"/>
                 </a:solidFill>
-                <a:latin typeface="Fredoka"/>
-                <a:ea typeface="Fredoka"/>
-                <a:cs typeface="Fredoka"/>
-                <a:sym typeface="Fredoka"/>
+                <a:latin typeface="Arial"/>
+                <a:ea typeface="Arial"/>
+                <a:cs typeface="Arial"/>
+                <a:sym typeface="Arial"/>
               </a:rPr>
               <a:t>3. Tablas Hash (Acceso Directo Secreto) </a:t>
             </a:r>
@@ -18449,14 +18448,14 @@
       </p:sp>
       <p:sp>
         <p:nvSpPr>
-          <p:cNvPr id="157" name="Google Shape;157;p16"/>
+          <p:cNvPr id="177" name="Google Shape;177;p1"/>
           <p:cNvSpPr txBox="1"/>
           <p:nvPr/>
         </p:nvSpPr>
         <p:spPr>
           <a:xfrm>
-            <a:off x="1009651" y="2118800"/>
-            <a:ext cx="2950500" cy="284700"/>
+            <a:off x="866908" y="1975925"/>
+            <a:ext cx="2950500" cy="577200"/>
           </a:xfrm>
           <a:prstGeom prst="rect">
             <a:avLst/>
@@ -18494,10 +18493,10 @@
                 <a:solidFill>
                   <a:srgbClr val="0F172A"/>
                 </a:solidFill>
-                <a:latin typeface="Fredoka"/>
-                <a:ea typeface="Fredoka"/>
-                <a:cs typeface="Fredoka"/>
-                <a:sym typeface="Fredoka"/>
+                <a:latin typeface="Arial"/>
+                <a:ea typeface="Arial"/>
+                <a:cs typeface="Arial"/>
+                <a:sym typeface="Arial"/>
               </a:rPr>
               <a:t>¿Cómo funciona la magia?</a:t>
             </a:r>
@@ -18515,14 +18514,14 @@
       </p:sp>
       <p:sp>
         <p:nvSpPr>
-          <p:cNvPr id="158" name="Google Shape;158;p16"/>
+          <p:cNvPr id="178" name="Google Shape;178;p1"/>
           <p:cNvSpPr txBox="1"/>
           <p:nvPr/>
         </p:nvSpPr>
         <p:spPr>
           <a:xfrm>
-            <a:off x="1009650" y="2486917"/>
-            <a:ext cx="4896000" cy="815700"/>
+            <a:off x="609600" y="2573100"/>
+            <a:ext cx="4972200" cy="923400"/>
           </a:xfrm>
           <a:prstGeom prst="rect">
             <a:avLst/>
@@ -18571,13 +18570,17 @@
               <a:solidFill>
                 <a:srgbClr val="000000"/>
               </a:solidFill>
+              <a:latin typeface="Arial"/>
+              <a:ea typeface="Arial"/>
+              <a:cs typeface="Arial"/>
+              <a:sym typeface="Arial"/>
             </a:endParaRPr>
           </a:p>
         </p:txBody>
       </p:sp>
       <p:sp>
         <p:nvSpPr>
-          <p:cNvPr id="159" name="Google Shape;159;p16"/>
+          <p:cNvPr id="179" name="Google Shape;179;p1"/>
           <p:cNvSpPr txBox="1"/>
           <p:nvPr/>
         </p:nvSpPr>
@@ -18627,31 +18630,7 @@
                 <a:cs typeface="JetBrains Mono"/>
                 <a:sym typeface="JetBrains Mono"/>
               </a:rPr>
-              <a:t>Clave ("Juan") 🡺 [Funci</a:t>
-            </a:r>
-            <a:r>
-              <a:rPr lang="en-US" sz="1855">
-                <a:solidFill>
-                  <a:srgbClr val="6B21A8"/>
-                </a:solidFill>
-                <a:latin typeface="JetBrains Mono"/>
-                <a:ea typeface="JetBrains Mono"/>
-                <a:cs typeface="JetBrains Mono"/>
-                <a:sym typeface="JetBrains Mono"/>
-              </a:rPr>
-              <a:t>ó</a:t>
-            </a:r>
-            <a:r>
-              <a:rPr b="0" i="0" lang="en-US" sz="1855" u="none" cap="none" strike="noStrike">
-                <a:solidFill>
-                  <a:srgbClr val="6B21A8"/>
-                </a:solidFill>
-                <a:latin typeface="JetBrains Mono"/>
-                <a:ea typeface="JetBrains Mono"/>
-                <a:cs typeface="JetBrains Mono"/>
-                <a:sym typeface="JetBrains Mono"/>
-              </a:rPr>
-              <a:t>n Hash] 🡺 Posición #5</a:t>
+              <a:t>Clave ("Juan") 🡺 [Función Hash] 🡺 Posición #5</a:t>
             </a:r>
             <a:endParaRPr b="0" i="0" sz="2526" u="none" cap="none" strike="noStrike">
               <a:solidFill>
@@ -18667,7 +18646,7 @@
       </p:sp>
       <p:sp>
         <p:nvSpPr>
-          <p:cNvPr id="160" name="Google Shape;160;p16"/>
+          <p:cNvPr id="180" name="Google Shape;180;p1"/>
           <p:cNvSpPr txBox="1"/>
           <p:nvPr/>
         </p:nvSpPr>
@@ -18712,10 +18691,10 @@
                 <a:solidFill>
                   <a:srgbClr val="0F172A"/>
                 </a:solidFill>
-                <a:latin typeface="Fredoka"/>
-                <a:ea typeface="Fredoka"/>
-                <a:cs typeface="Fredoka"/>
-                <a:sym typeface="Fredoka"/>
+                <a:latin typeface="Arial"/>
+                <a:ea typeface="Arial"/>
+                <a:cs typeface="Arial"/>
+                <a:sym typeface="Arial"/>
               </a:rPr>
               <a:t>¿Qué tan rápido es?</a:t>
             </a:r>
@@ -18733,7 +18712,7 @@
       </p:sp>
       <p:sp>
         <p:nvSpPr>
-          <p:cNvPr id="161" name="Google Shape;161;p16"/>
+          <p:cNvPr id="181" name="Google Shape;181;p1"/>
           <p:cNvSpPr txBox="1"/>
           <p:nvPr/>
         </p:nvSpPr>
@@ -18799,7 +18778,7 @@
       </p:sp>
       <p:sp>
         <p:nvSpPr>
-          <p:cNvPr id="162" name="Google Shape;162;p16"/>
+          <p:cNvPr id="182" name="Google Shape;182;p1"/>
           <p:cNvSpPr txBox="1"/>
           <p:nvPr/>
         </p:nvSpPr>
@@ -18855,13 +18834,17 @@
               <a:solidFill>
                 <a:srgbClr val="000000"/>
               </a:solidFill>
+              <a:latin typeface="Arial"/>
+              <a:ea typeface="Arial"/>
+              <a:cs typeface="Arial"/>
+              <a:sym typeface="Arial"/>
             </a:endParaRPr>
           </a:p>
         </p:txBody>
       </p:sp>
       <p:sp>
         <p:nvSpPr>
-          <p:cNvPr id="163" name="Google Shape;163;p16"/>
+          <p:cNvPr id="183" name="Google Shape;183;p1"/>
           <p:cNvSpPr txBox="1"/>
           <p:nvPr/>
         </p:nvSpPr>
@@ -18927,7 +18910,7 @@
       </p:sp>
       <p:sp>
         <p:nvSpPr>
-          <p:cNvPr id="164" name="Google Shape;164;p16"/>
+          <p:cNvPr id="184" name="Google Shape;184;p1"/>
           <p:cNvSpPr txBox="1"/>
           <p:nvPr/>
         </p:nvSpPr>
@@ -18983,13 +18966,17 @@
               <a:solidFill>
                 <a:srgbClr val="000000"/>
               </a:solidFill>
+              <a:latin typeface="Arial"/>
+              <a:ea typeface="Arial"/>
+              <a:cs typeface="Arial"/>
+              <a:sym typeface="Arial"/>
             </a:endParaRPr>
           </a:p>
         </p:txBody>
       </p:sp>
       <p:sp>
         <p:nvSpPr>
-          <p:cNvPr id="165" name="Google Shape;165;p16"/>
+          <p:cNvPr id="185" name="Google Shape;185;p1"/>
           <p:cNvSpPr txBox="1"/>
           <p:nvPr/>
         </p:nvSpPr>
@@ -19022,6 +19009,11 @@
               <a:spcAft>
                 <a:spcPts val="0"/>
               </a:spcAft>
+              <a:buClr>
+                <a:srgbClr val="000000"/>
+              </a:buClr>
+              <a:buSzPts val="1800"/>
+              <a:buFont typeface="Arial"/>
               <a:buNone/>
             </a:pPr>
             <a:r>
@@ -19029,30 +19021,37 @@
                 <a:solidFill>
                   <a:srgbClr val="000000"/>
                 </a:solidFill>
-                <a:latin typeface="Fredoka"/>
-                <a:ea typeface="Fredoka"/>
-                <a:cs typeface="Fredoka"/>
-                <a:sym typeface="Fredoka"/>
+                <a:latin typeface="Arial"/>
+                <a:ea typeface="Arial"/>
+                <a:cs typeface="Arial"/>
+                <a:sym typeface="Arial"/>
               </a:rPr>
               <a:t>En Python se conocen como: Diccionarios</a:t>
             </a:r>
-            <a:endParaRPr b="1" sz="1800"/>
+            <a:endParaRPr b="1" i="0" sz="1800" u="none" cap="none" strike="noStrike">
+              <a:solidFill>
+                <a:srgbClr val="000000"/>
+              </a:solidFill>
+              <a:latin typeface="Arial"/>
+              <a:ea typeface="Arial"/>
+              <a:cs typeface="Arial"/>
+              <a:sym typeface="Arial"/>
+            </a:endParaRPr>
           </a:p>
         </p:txBody>
       </p:sp>
       <p:pic>
         <p:nvPicPr>
-          <p:cNvPr id="166" name="Google Shape;166;p16" title="images.png"/>
+          <p:cNvPr id="186" name="Google Shape;186;p1" title="images.png"/>
           <p:cNvPicPr preferRelativeResize="0"/>
           <p:nvPr/>
         </p:nvPicPr>
-        <p:blipFill>
+        <p:blipFill rotWithShape="1">
           <a:blip r:embed="rId3">
             <a:alphaModFix/>
           </a:blip>
-          <a:stretch>
-            <a:fillRect/>
-          </a:stretch>
+          <a:srcRect b="0" l="0" r="0" t="0"/>
+          <a:stretch/>
         </p:blipFill>
         <p:spPr>
           <a:xfrm>
